--- a/docs/submission/VaaniNotes_Pitch.pptx
+++ b/docs/submission/VaaniNotes_Pitch.pptx
@@ -9203,7 +9203,7 @@
                 </a:solidFill>
                 <a:latin typeface="Segoe UI"/>
               </a:rPr>
-              <a:t>•  11 unit tests, including the AI Hub decoder I/O contract</a:t>
+              <a:t>•  20 automated tests: AI Hub decoder I/O contract, notes pipeline, web API</a:t>
             </a:r>
           </a:p>
           <a:p>
